--- a/Lectures/2_Training_gLLMs.pptx
+++ b/Lectures/2_Training_gLLMs.pptx
@@ -11,37 +11,39 @@
     <p:sldId id="259" r:id="rId9"/>
     <p:sldId id="260" r:id="rId10"/>
     <p:sldId id="261" r:id="rId11"/>
+    <p:sldId id="262" r:id="rId12"/>
+    <p:sldId id="263" r:id="rId13"/>
   </p:sldIdLst>
   <p:sldSz cx="18288000" cy="10287000"/>
   <p:notesSz cx="6858000" cy="9144000"/>
   <p:embeddedFontLst>
     <p:embeddedFont>
       <p:font typeface="Poppins Bold" charset="1" panose="00000800000000000000"/>
-      <p:regular r:id="rId12"/>
+      <p:regular r:id="rId14"/>
     </p:embeddedFont>
     <p:embeddedFont>
       <p:font typeface="Poppins Ultra-Bold" charset="1" panose="00000900000000000000"/>
-      <p:regular r:id="rId13"/>
+      <p:regular r:id="rId15"/>
     </p:embeddedFont>
     <p:embeddedFont>
       <p:font typeface="Canva Sans Bold" charset="1" panose="020B0803030501040103"/>
-      <p:regular r:id="rId14"/>
+      <p:regular r:id="rId16"/>
     </p:embeddedFont>
     <p:embeddedFont>
       <p:font typeface="Poppins Italics" charset="1" panose="00000500000000000000"/>
-      <p:regular r:id="rId15"/>
+      <p:regular r:id="rId17"/>
     </p:embeddedFont>
     <p:embeddedFont>
       <p:font typeface="Canva Sans" charset="1" panose="020B0503030501040103"/>
-      <p:regular r:id="rId16"/>
+      <p:regular r:id="rId18"/>
     </p:embeddedFont>
     <p:embeddedFont>
       <p:font typeface="Canva Sans Italics" charset="1" panose="020B0503030501040103"/>
-      <p:regular r:id="rId17"/>
+      <p:regular r:id="rId19"/>
     </p:embeddedFont>
     <p:embeddedFont>
       <p:font typeface="Poppins" charset="1" panose="00000500000000000000"/>
-      <p:regular r:id="rId18"/>
+      <p:regular r:id="rId20"/>
     </p:embeddedFont>
   </p:embeddedFontLst>
   <p:defaultTextStyle>
@@ -6428,9 +6430,9 @@
         <p:grpSpPr>
           <a:xfrm rot="0">
             <a:off x="884067" y="6134100"/>
-            <a:ext cx="16610635" cy="3086100"/>
+            <a:ext cx="16610635" cy="3610881"/>
             <a:chOff x="0" y="0"/>
-            <a:chExt cx="22147513" cy="4114800"/>
+            <a:chExt cx="22147513" cy="4814508"/>
           </a:xfrm>
         </p:grpSpPr>
         <p:grpSp>
@@ -6442,9 +6444,9 @@
           <p:grpSpPr>
             <a:xfrm rot="0">
               <a:off x="0" y="0"/>
-              <a:ext cx="22147513" cy="4114800"/>
+              <a:ext cx="22147513" cy="4814508"/>
               <a:chOff x="0" y="0"/>
-              <a:chExt cx="4374817" cy="812800"/>
+              <a:chExt cx="4374817" cy="951014"/>
             </a:xfrm>
           </p:grpSpPr>
           <p:sp>
@@ -6456,7 +6458,7 @@
             <p:spPr>
               <a:xfrm flipH="false" flipV="false" rot="0">
                 <a:off x="0" y="0"/>
-                <a:ext cx="4374817" cy="812800"/>
+                <a:ext cx="4374817" cy="951014"/>
               </a:xfrm>
               <a:custGeom>
                 <a:avLst/>
@@ -6465,7 +6467,7 @@
                 <a:cxnLst/>
                 <a:rect r="r" b="b" t="t" l="l"/>
                 <a:pathLst>
-                  <a:path h="812800" w="4374817">
+                  <a:path h="951014" w="4374817">
                     <a:moveTo>
                       <a:pt x="23770" y="0"/>
                     </a:moveTo>
@@ -6483,30 +6485,30 @@
                       <a:pt x="4374817" y="23770"/>
                     </a:cubicBezTo>
                     <a:lnTo>
-                      <a:pt x="4374817" y="789030"/>
+                      <a:pt x="4374817" y="927244"/>
                     </a:lnTo>
                     <a:cubicBezTo>
-                      <a:pt x="4374817" y="795334"/>
-                      <a:pt x="4372313" y="801380"/>
-                      <a:pt x="4367855" y="805838"/>
+                      <a:pt x="4374817" y="933548"/>
+                      <a:pt x="4372313" y="939594"/>
+                      <a:pt x="4367855" y="944052"/>
                     </a:cubicBezTo>
                     <a:cubicBezTo>
-                      <a:pt x="4363398" y="810296"/>
-                      <a:pt x="4357351" y="812800"/>
-                      <a:pt x="4351047" y="812800"/>
+                      <a:pt x="4363398" y="948510"/>
+                      <a:pt x="4357351" y="951014"/>
+                      <a:pt x="4351047" y="951014"/>
                     </a:cubicBezTo>
                     <a:lnTo>
-                      <a:pt x="23770" y="812800"/>
+                      <a:pt x="23770" y="951014"/>
                     </a:lnTo>
                     <a:cubicBezTo>
-                      <a:pt x="17466" y="812800"/>
-                      <a:pt x="11420" y="810296"/>
-                      <a:pt x="6962" y="805838"/>
+                      <a:pt x="17466" y="951014"/>
+                      <a:pt x="11420" y="948510"/>
+                      <a:pt x="6962" y="944052"/>
                     </a:cubicBezTo>
                     <a:cubicBezTo>
-                      <a:pt x="2504" y="801380"/>
-                      <a:pt x="0" y="795334"/>
-                      <a:pt x="0" y="789030"/>
+                      <a:pt x="2504" y="939594"/>
+                      <a:pt x="0" y="933548"/>
+                      <a:pt x="0" y="927244"/>
                     </a:cubicBezTo>
                     <a:lnTo>
                       <a:pt x="0" y="23770"/>
@@ -6543,7 +6545,7 @@
             <p:spPr>
               <a:xfrm>
                 <a:off x="0" y="-38100"/>
-                <a:ext cx="4374817" cy="850900"/>
+                <a:ext cx="4374817" cy="989114"/>
               </a:xfrm>
               <a:prstGeom prst="rect">
                 <a:avLst/>
@@ -6695,7 +6697,7 @@
           <p:spPr>
             <a:xfrm rot="0">
               <a:off x="192844" y="145342"/>
-              <a:ext cx="10971695" cy="3399632"/>
+              <a:ext cx="10971695" cy="4099340"/>
             </a:xfrm>
             <a:prstGeom prst="rect">
               <a:avLst/>
@@ -6787,7 +6789,7 @@
                   <a:cs typeface="Poppins"/>
                   <a:sym typeface="Poppins"/>
                 </a:rPr>
-                <a:t>Not commonly used for gLLMs</a:t>
+                <a:t>Mainly used in models that generate synthetic DNA/protein sequences, e.g., Evo2</a:t>
               </a:r>
             </a:p>
           </p:txBody>
@@ -7154,7 +7156,7 @@
         <p:spPr>
           <a:xfrm rot="0">
             <a:off x="1020179" y="1219835"/>
-            <a:ext cx="16230600" cy="3511550"/>
+            <a:ext cx="16230600" cy="3824605"/>
           </a:xfrm>
           <a:prstGeom prst="rect">
             <a:avLst/>
@@ -7166,15 +7168,15 @@
           </a:bodyPr>
           <a:lstStyle/>
           <a:p>
-            <a:pPr algn="l" marL="431801" indent="-215900" lvl="1">
+            <a:pPr algn="l" marL="474979" indent="-237490" lvl="1">
               <a:lnSpc>
-                <a:spcPts val="4000"/>
+                <a:spcPts val="4399"/>
               </a:lnSpc>
               <a:buFont typeface="Arial"/>
               <a:buChar char="•"/>
             </a:pPr>
             <a:r>
-              <a:rPr lang="en-US" sz="2000">
+              <a:rPr lang="en-US" sz="2199">
                 <a:solidFill>
                   <a:srgbClr val="025841"/>
                 </a:solidFill>
@@ -7189,20 +7191,20 @@
           <a:p>
             <a:pPr algn="l">
               <a:lnSpc>
-                <a:spcPts val="4000"/>
+                <a:spcPts val="4399"/>
               </a:lnSpc>
             </a:pPr>
           </a:p>
           <a:p>
-            <a:pPr algn="l" marL="431801" indent="-215900" lvl="1">
+            <a:pPr algn="l" marL="474979" indent="-237490" lvl="1">
               <a:lnSpc>
-                <a:spcPts val="4000"/>
+                <a:spcPts val="4399"/>
               </a:lnSpc>
               <a:buFont typeface="Arial"/>
               <a:buChar char="•"/>
             </a:pPr>
             <a:r>
-              <a:rPr lang="en-US" sz="2000">
+              <a:rPr lang="en-US" sz="2199">
                 <a:solidFill>
                   <a:srgbClr val="025841"/>
                 </a:solidFill>
@@ -7217,20 +7219,20 @@
           <a:p>
             <a:pPr algn="l">
               <a:lnSpc>
-                <a:spcPts val="4000"/>
+                <a:spcPts val="4399"/>
               </a:lnSpc>
             </a:pPr>
           </a:p>
           <a:p>
-            <a:pPr algn="l" marL="431801" indent="-215900" lvl="1">
+            <a:pPr algn="l" marL="474979" indent="-237490" lvl="1">
               <a:lnSpc>
-                <a:spcPts val="4000"/>
+                <a:spcPts val="4399"/>
               </a:lnSpc>
               <a:buFont typeface="Arial"/>
               <a:buChar char="•"/>
             </a:pPr>
             <a:r>
-              <a:rPr lang="en-US" sz="2000">
+              <a:rPr lang="en-US" sz="2199">
                 <a:solidFill>
                   <a:srgbClr val="025841"/>
                 </a:solidFill>
@@ -7245,14 +7247,14 @@
           <a:p>
             <a:pPr algn="l">
               <a:lnSpc>
-                <a:spcPts val="4000"/>
+                <a:spcPts val="4399"/>
               </a:lnSpc>
             </a:pPr>
           </a:p>
           <a:p>
             <a:pPr algn="l">
               <a:lnSpc>
-                <a:spcPts val="4000"/>
+                <a:spcPts val="4399"/>
               </a:lnSpc>
             </a:pPr>
           </a:p>
@@ -7501,7 +7503,7 @@
         <p:spPr>
           <a:xfrm rot="0">
             <a:off x="1028700" y="5195217"/>
-            <a:ext cx="16230600" cy="3511550"/>
+            <a:ext cx="16230600" cy="3824605"/>
           </a:xfrm>
           <a:prstGeom prst="rect">
             <a:avLst/>
@@ -7513,15 +7515,15 @@
           </a:bodyPr>
           <a:lstStyle/>
           <a:p>
-            <a:pPr algn="l" marL="431801" indent="-215900" lvl="1">
+            <a:pPr algn="l" marL="474979" indent="-237490" lvl="1">
               <a:lnSpc>
-                <a:spcPts val="4000"/>
+                <a:spcPts val="4399"/>
               </a:lnSpc>
               <a:buFont typeface="Arial"/>
               <a:buChar char="•"/>
             </a:pPr>
             <a:r>
-              <a:rPr lang="en-US" sz="2000">
+              <a:rPr lang="en-US" sz="2199">
                 <a:solidFill>
                   <a:srgbClr val="025841"/>
                 </a:solidFill>
@@ -7534,15 +7536,15 @@
             </a:r>
           </a:p>
           <a:p>
-            <a:pPr algn="l" marL="863601" indent="-287867" lvl="2">
+            <a:pPr algn="l" marL="949959" indent="-316653" lvl="2">
               <a:lnSpc>
-                <a:spcPts val="4000"/>
+                <a:spcPts val="4399"/>
               </a:lnSpc>
               <a:buFont typeface="Arial"/>
               <a:buChar char="⚬"/>
             </a:pPr>
             <a:r>
-              <a:rPr lang="en-US" sz="2000">
+              <a:rPr lang="en-US" sz="2199">
                 <a:solidFill>
                   <a:srgbClr val="025841"/>
                 </a:solidFill>
@@ -7555,15 +7557,15 @@
             </a:r>
           </a:p>
           <a:p>
-            <a:pPr algn="l" marL="431801" indent="-215900" lvl="1">
+            <a:pPr algn="l" marL="474979" indent="-237490" lvl="1">
               <a:lnSpc>
-                <a:spcPts val="4000"/>
+                <a:spcPts val="4399"/>
               </a:lnSpc>
               <a:buFont typeface="Arial"/>
               <a:buChar char="•"/>
             </a:pPr>
             <a:r>
-              <a:rPr lang="en-US" sz="2000">
+              <a:rPr lang="en-US" sz="2199">
                 <a:solidFill>
                   <a:srgbClr val="025841"/>
                 </a:solidFill>
@@ -7576,15 +7578,15 @@
             </a:r>
           </a:p>
           <a:p>
-            <a:pPr algn="l" marL="863601" indent="-287867" lvl="2">
+            <a:pPr algn="l" marL="949959" indent="-316653" lvl="2">
               <a:lnSpc>
-                <a:spcPts val="4000"/>
+                <a:spcPts val="4399"/>
               </a:lnSpc>
               <a:buFont typeface="Arial"/>
               <a:buChar char="⚬"/>
             </a:pPr>
             <a:r>
-              <a:rPr lang="en-US" sz="2000">
+              <a:rPr lang="en-US" sz="2199">
                 <a:solidFill>
                   <a:srgbClr val="025841"/>
                 </a:solidFill>
@@ -7597,15 +7599,15 @@
             </a:r>
           </a:p>
           <a:p>
-            <a:pPr algn="l" marL="863601" indent="-287867" lvl="2">
+            <a:pPr algn="l" marL="949959" indent="-316653" lvl="2">
               <a:lnSpc>
-                <a:spcPts val="4000"/>
+                <a:spcPts val="4399"/>
               </a:lnSpc>
               <a:buFont typeface="Arial"/>
               <a:buChar char="⚬"/>
             </a:pPr>
             <a:r>
-              <a:rPr lang="en-US" sz="2000">
+              <a:rPr lang="en-US" sz="2199">
                 <a:solidFill>
                   <a:srgbClr val="025841"/>
                 </a:solidFill>
@@ -7620,14 +7622,14 @@
           <a:p>
             <a:pPr algn="l">
               <a:lnSpc>
-                <a:spcPts val="4000"/>
+                <a:spcPts val="4399"/>
               </a:lnSpc>
             </a:pPr>
           </a:p>
           <a:p>
             <a:pPr algn="l">
               <a:lnSpc>
-                <a:spcPts val="4000"/>
+                <a:spcPts val="4399"/>
               </a:lnSpc>
             </a:pPr>
           </a:p>
@@ -7686,6 +7688,1157 @@
 </file>
 
 <file path=ppt/slides/slide5.xml><?xml version="1.0" encoding="utf-8"?>
+<p:sld xmlns:p="http://schemas.openxmlformats.org/presentationml/2006/main" xmlns:a="http://schemas.openxmlformats.org/drawingml/2006/main" xmlns:r="http://schemas.openxmlformats.org/officeDocument/2006/relationships">
+  <p:cSld>
+    <p:spTree>
+      <p:nvGrpSpPr>
+        <p:cNvPr id="1" name=""/>
+        <p:cNvGrpSpPr/>
+        <p:nvPr/>
+      </p:nvGrpSpPr>
+      <p:grpSpPr>
+        <a:xfrm>
+          <a:off x="0" y="0"/>
+          <a:ext cx="0" cy="0"/>
+          <a:chOff x="0" y="0"/>
+          <a:chExt cx="0" cy="0"/>
+        </a:xfrm>
+      </p:grpSpPr>
+      <p:sp>
+        <p:nvSpPr>
+          <p:cNvPr name="Freeform 2" id="2"/>
+          <p:cNvSpPr/>
+          <p:nvPr/>
+        </p:nvSpPr>
+        <p:spPr>
+          <a:xfrm flipH="false" flipV="false" rot="0">
+            <a:off x="-1605763" y="-535229"/>
+            <a:ext cx="6455904" cy="6105039"/>
+          </a:xfrm>
+          <a:custGeom>
+            <a:avLst/>
+            <a:gdLst/>
+            <a:ahLst/>
+            <a:cxnLst/>
+            <a:rect r="r" b="b" t="t" l="l"/>
+            <a:pathLst>
+              <a:path h="6105039" w="6455904">
+                <a:moveTo>
+                  <a:pt x="0" y="0"/>
+                </a:moveTo>
+                <a:lnTo>
+                  <a:pt x="6455903" y="0"/>
+                </a:lnTo>
+                <a:lnTo>
+                  <a:pt x="6455903" y="6105039"/>
+                </a:lnTo>
+                <a:lnTo>
+                  <a:pt x="0" y="6105039"/>
+                </a:lnTo>
+                <a:lnTo>
+                  <a:pt x="0" y="0"/>
+                </a:lnTo>
+                <a:close/>
+              </a:path>
+            </a:pathLst>
+          </a:custGeom>
+          <a:blipFill>
+            <a:blip r:embed="rId2">
+              <a:alphaModFix amt="14000"/>
+              <a:extLst>
+                <a:ext uri="{96DAC541-7B7A-43D3-8B79-37D633B846F1}">
+                  <asvg:svgBlip xmlns:asvg="http://schemas.microsoft.com/office/drawing/2016/SVG/main" r:embed="rId3"/>
+                </a:ext>
+              </a:extLst>
+            </a:blip>
+            <a:stretch>
+              <a:fillRect l="0" t="0" r="0" b="0"/>
+            </a:stretch>
+          </a:blipFill>
+        </p:spPr>
+      </p:sp>
+      <p:sp>
+        <p:nvSpPr>
+          <p:cNvPr name="Freeform 3" id="3"/>
+          <p:cNvSpPr/>
+          <p:nvPr/>
+        </p:nvSpPr>
+        <p:spPr>
+          <a:xfrm flipH="false" flipV="false" rot="0">
+            <a:off x="14031348" y="-1785840"/>
+            <a:ext cx="6455904" cy="6105039"/>
+          </a:xfrm>
+          <a:custGeom>
+            <a:avLst/>
+            <a:gdLst/>
+            <a:ahLst/>
+            <a:cxnLst/>
+            <a:rect r="r" b="b" t="t" l="l"/>
+            <a:pathLst>
+              <a:path h="6105039" w="6455904">
+                <a:moveTo>
+                  <a:pt x="0" y="0"/>
+                </a:moveTo>
+                <a:lnTo>
+                  <a:pt x="6455904" y="0"/>
+                </a:lnTo>
+                <a:lnTo>
+                  <a:pt x="6455904" y="6105039"/>
+                </a:lnTo>
+                <a:lnTo>
+                  <a:pt x="0" y="6105039"/>
+                </a:lnTo>
+                <a:lnTo>
+                  <a:pt x="0" y="0"/>
+                </a:lnTo>
+                <a:close/>
+              </a:path>
+            </a:pathLst>
+          </a:custGeom>
+          <a:blipFill>
+            <a:blip r:embed="rId2">
+              <a:alphaModFix amt="14000"/>
+              <a:extLst>
+                <a:ext uri="{96DAC541-7B7A-43D3-8B79-37D633B846F1}">
+                  <asvg:svgBlip xmlns:asvg="http://schemas.microsoft.com/office/drawing/2016/SVG/main" r:embed="rId3"/>
+                </a:ext>
+              </a:extLst>
+            </a:blip>
+            <a:stretch>
+              <a:fillRect l="0" t="0" r="0" b="0"/>
+            </a:stretch>
+          </a:blipFill>
+        </p:spPr>
+      </p:sp>
+      <p:sp>
+        <p:nvSpPr>
+          <p:cNvPr name="Freeform 4" id="4"/>
+          <p:cNvSpPr/>
+          <p:nvPr/>
+        </p:nvSpPr>
+        <p:spPr>
+          <a:xfrm flipH="false" flipV="false" rot="0">
+            <a:off x="721522" y="4501520"/>
+            <a:ext cx="9345355" cy="4574459"/>
+          </a:xfrm>
+          <a:custGeom>
+            <a:avLst/>
+            <a:gdLst/>
+            <a:ahLst/>
+            <a:cxnLst/>
+            <a:rect r="r" b="b" t="t" l="l"/>
+            <a:pathLst>
+              <a:path h="4574459" w="9345355">
+                <a:moveTo>
+                  <a:pt x="0" y="0"/>
+                </a:moveTo>
+                <a:lnTo>
+                  <a:pt x="9345355" y="0"/>
+                </a:lnTo>
+                <a:lnTo>
+                  <a:pt x="9345355" y="4574459"/>
+                </a:lnTo>
+                <a:lnTo>
+                  <a:pt x="0" y="4574459"/>
+                </a:lnTo>
+                <a:lnTo>
+                  <a:pt x="0" y="0"/>
+                </a:lnTo>
+                <a:close/>
+              </a:path>
+            </a:pathLst>
+          </a:custGeom>
+          <a:blipFill>
+            <a:blip r:embed="rId4"/>
+            <a:stretch>
+              <a:fillRect l="-5089" t="-78891" r="-82467" b="0"/>
+            </a:stretch>
+          </a:blipFill>
+        </p:spPr>
+      </p:sp>
+      <p:sp>
+        <p:nvSpPr>
+          <p:cNvPr name="TextBox 5" id="5"/>
+          <p:cNvSpPr txBox="true"/>
+          <p:nvPr/>
+        </p:nvSpPr>
+        <p:spPr>
+          <a:xfrm rot="0">
+            <a:off x="1010654" y="610553"/>
+            <a:ext cx="15309895" cy="826769"/>
+          </a:xfrm>
+          <a:prstGeom prst="rect">
+            <a:avLst/>
+          </a:prstGeom>
+        </p:spPr>
+        <p:txBody>
+          <a:bodyPr anchor="t" rtlCol="false" tIns="0" lIns="0" bIns="0" rIns="0">
+            <a:spAutoFit/>
+          </a:bodyPr>
+          <a:lstStyle/>
+          <a:p>
+            <a:pPr algn="ctr">
+              <a:lnSpc>
+                <a:spcPts val="5639"/>
+              </a:lnSpc>
+            </a:pPr>
+            <a:r>
+              <a:rPr lang="en-US" b="true" sz="5999">
+                <a:solidFill>
+                  <a:srgbClr val="025841"/>
+                </a:solidFill>
+                <a:latin typeface="Poppins Ultra-Bold"/>
+                <a:ea typeface="Poppins Ultra-Bold"/>
+                <a:cs typeface="Poppins Ultra-Bold"/>
+                <a:sym typeface="Poppins Ultra-Bold"/>
+              </a:rPr>
+              <a:t>GLM EMBEDDINGS</a:t>
+            </a:r>
+          </a:p>
+        </p:txBody>
+      </p:sp>
+      <p:sp>
+        <p:nvSpPr>
+          <p:cNvPr name="TextBox 6" id="6"/>
+          <p:cNvSpPr txBox="true"/>
+          <p:nvPr/>
+        </p:nvSpPr>
+        <p:spPr>
+          <a:xfrm rot="0">
+            <a:off x="1020179" y="1629410"/>
+            <a:ext cx="16230600" cy="2271396"/>
+          </a:xfrm>
+          <a:prstGeom prst="rect">
+            <a:avLst/>
+          </a:prstGeom>
+        </p:spPr>
+        <p:txBody>
+          <a:bodyPr anchor="t" rtlCol="false" tIns="0" lIns="0" bIns="0" rIns="0">
+            <a:spAutoFit/>
+          </a:bodyPr>
+          <a:lstStyle/>
+          <a:p>
+            <a:pPr algn="l" marL="496569" indent="-248284" lvl="1">
+              <a:lnSpc>
+                <a:spcPts val="4599"/>
+              </a:lnSpc>
+              <a:buFont typeface="Arial"/>
+              <a:buChar char="•"/>
+            </a:pPr>
+            <a:r>
+              <a:rPr lang="en-US" sz="2299">
+                <a:solidFill>
+                  <a:srgbClr val="025841"/>
+                </a:solidFill>
+                <a:latin typeface="Poppins"/>
+                <a:ea typeface="Poppins"/>
+                <a:cs typeface="Poppins"/>
+                <a:sym typeface="Poppins"/>
+              </a:rPr>
+              <a:t>Embeddings are the </a:t>
+            </a:r>
+            <a:r>
+              <a:rPr lang="en-US" b="true" sz="2299">
+                <a:solidFill>
+                  <a:srgbClr val="025841"/>
+                </a:solidFill>
+                <a:latin typeface="Poppins Bold"/>
+                <a:ea typeface="Poppins Bold"/>
+                <a:cs typeface="Poppins Bold"/>
+                <a:sym typeface="Poppins Bold"/>
+              </a:rPr>
+              <a:t>model’s internal representation</a:t>
+            </a:r>
+            <a:r>
+              <a:rPr lang="en-US" sz="2299">
+                <a:solidFill>
+                  <a:srgbClr val="025841"/>
+                </a:solidFill>
+                <a:latin typeface="Poppins"/>
+                <a:ea typeface="Poppins"/>
+                <a:cs typeface="Poppins"/>
+                <a:sym typeface="Poppins"/>
+              </a:rPr>
+              <a:t> of the input sequences as vectors of numbers</a:t>
+            </a:r>
+          </a:p>
+          <a:p>
+            <a:pPr algn="l" marL="496569" indent="-248284" lvl="1">
+              <a:lnSpc>
+                <a:spcPts val="4599"/>
+              </a:lnSpc>
+              <a:buFont typeface="Arial"/>
+              <a:buChar char="•"/>
+            </a:pPr>
+            <a:r>
+              <a:rPr lang="en-US" sz="2299">
+                <a:solidFill>
+                  <a:srgbClr val="025841"/>
+                </a:solidFill>
+                <a:latin typeface="Poppins"/>
+                <a:ea typeface="Poppins"/>
+                <a:cs typeface="Poppins"/>
+                <a:sym typeface="Poppins"/>
+              </a:rPr>
+              <a:t>They capture </a:t>
+            </a:r>
+            <a:r>
+              <a:rPr lang="en-US" b="true" sz="2299">
+                <a:solidFill>
+                  <a:srgbClr val="025841"/>
+                </a:solidFill>
+                <a:latin typeface="Poppins Bold"/>
+                <a:ea typeface="Poppins Bold"/>
+                <a:cs typeface="Poppins Bold"/>
+                <a:sym typeface="Poppins Bold"/>
+              </a:rPr>
+              <a:t>information</a:t>
+            </a:r>
+            <a:r>
+              <a:rPr lang="en-US" sz="2299">
+                <a:solidFill>
+                  <a:srgbClr val="025841"/>
+                </a:solidFill>
+                <a:latin typeface="Poppins"/>
+                <a:ea typeface="Poppins"/>
+                <a:cs typeface="Poppins"/>
+                <a:sym typeface="Poppins"/>
+              </a:rPr>
+              <a:t> and </a:t>
+            </a:r>
+            <a:r>
+              <a:rPr lang="en-US" b="true" sz="2299">
+                <a:solidFill>
+                  <a:srgbClr val="025841"/>
+                </a:solidFill>
+                <a:latin typeface="Poppins Bold"/>
+                <a:ea typeface="Poppins Bold"/>
+                <a:cs typeface="Poppins Bold"/>
+                <a:sym typeface="Poppins Bold"/>
+              </a:rPr>
+              <a:t>context</a:t>
+            </a:r>
+            <a:r>
+              <a:rPr lang="en-US" sz="2299">
+                <a:solidFill>
+                  <a:srgbClr val="025841"/>
+                </a:solidFill>
+                <a:latin typeface="Poppins"/>
+                <a:ea typeface="Poppins"/>
+                <a:cs typeface="Poppins"/>
+                <a:sym typeface="Poppins"/>
+              </a:rPr>
+              <a:t> about the sequences, that can be used in downstream tasks</a:t>
+            </a:r>
+          </a:p>
+          <a:p>
+            <a:pPr algn="l" marL="496569" indent="-248284" lvl="1">
+              <a:lnSpc>
+                <a:spcPts val="4599"/>
+              </a:lnSpc>
+              <a:buFont typeface="Arial"/>
+              <a:buChar char="•"/>
+            </a:pPr>
+            <a:r>
+              <a:rPr lang="en-US" sz="2299">
+                <a:solidFill>
+                  <a:srgbClr val="025841"/>
+                </a:solidFill>
+                <a:latin typeface="Poppins"/>
+                <a:ea typeface="Poppins"/>
+                <a:cs typeface="Poppins"/>
+                <a:sym typeface="Poppins"/>
+              </a:rPr>
+              <a:t>The embeddings are usually extracted from the last layer.  At this stage, the hidden state represents a culmination of all the model's computations, and provides the most informative context.</a:t>
+            </a:r>
+          </a:p>
+        </p:txBody>
+      </p:sp>
+      <p:sp>
+        <p:nvSpPr>
+          <p:cNvPr name="TextBox 7" id="7"/>
+          <p:cNvSpPr txBox="true"/>
+          <p:nvPr/>
+        </p:nvSpPr>
+        <p:spPr>
+          <a:xfrm rot="0">
+            <a:off x="1028700" y="9377045"/>
+            <a:ext cx="11425182" cy="656590"/>
+          </a:xfrm>
+          <a:prstGeom prst="rect">
+            <a:avLst/>
+          </a:prstGeom>
+        </p:spPr>
+        <p:txBody>
+          <a:bodyPr anchor="t" rtlCol="false" tIns="0" lIns="0" bIns="0" rIns="0">
+            <a:spAutoFit/>
+          </a:bodyPr>
+          <a:lstStyle/>
+          <a:p>
+            <a:pPr algn="l" marL="410209" indent="-205105" lvl="1">
+              <a:lnSpc>
+                <a:spcPts val="2659"/>
+              </a:lnSpc>
+              <a:buFont typeface="Arial"/>
+              <a:buChar char="•"/>
+            </a:pPr>
+            <a:r>
+              <a:rPr lang="en-US" sz="1899" i="true">
+                <a:solidFill>
+                  <a:srgbClr val="025841"/>
+                </a:solidFill>
+                <a:latin typeface="Canva Sans Italics"/>
+                <a:ea typeface="Canva Sans Italics"/>
+                <a:cs typeface="Canva Sans Italics"/>
+                <a:sym typeface="Canva Sans Italics"/>
+              </a:rPr>
+              <a:t>https://huggingface.co/spaces/hesamation/primer-llm-embedding</a:t>
+            </a:r>
+          </a:p>
+          <a:p>
+            <a:pPr algn="l" marL="410209" indent="-205105" lvl="1">
+              <a:lnSpc>
+                <a:spcPts val="2659"/>
+              </a:lnSpc>
+              <a:buFont typeface="Arial"/>
+              <a:buChar char="•"/>
+            </a:pPr>
+            <a:r>
+              <a:rPr lang="en-US" sz="1899">
+                <a:solidFill>
+                  <a:srgbClr val="025841"/>
+                </a:solidFill>
+                <a:latin typeface="Canva Sans"/>
+                <a:ea typeface="Canva Sans"/>
+                <a:cs typeface="Canva Sans"/>
+                <a:sym typeface="Canva Sans"/>
+              </a:rPr>
+              <a:t>Liu, T. </a:t>
+            </a:r>
+            <a:r>
+              <a:rPr lang="en-US" sz="1899" i="true">
+                <a:solidFill>
+                  <a:srgbClr val="025841"/>
+                </a:solidFill>
+                <a:latin typeface="Canva Sans Italics"/>
+                <a:ea typeface="Canva Sans Italics"/>
+                <a:cs typeface="Canva Sans Italics"/>
+                <a:sym typeface="Canva Sans Italics"/>
+              </a:rPr>
+              <a:t>et al,</a:t>
+            </a:r>
+            <a:r>
+              <a:rPr lang="en-US" sz="1899">
+                <a:solidFill>
+                  <a:srgbClr val="025841"/>
+                </a:solidFill>
+                <a:latin typeface="Canva Sans"/>
+                <a:ea typeface="Canva Sans"/>
+                <a:cs typeface="Canva Sans"/>
+                <a:sym typeface="Canva Sans"/>
+              </a:rPr>
+              <a:t> (2026), </a:t>
+            </a:r>
+            <a:r>
+              <a:rPr lang="en-US" sz="1899" i="true">
+                <a:solidFill>
+                  <a:srgbClr val="025841"/>
+                </a:solidFill>
+                <a:latin typeface="Canva Sans Italics"/>
+                <a:ea typeface="Canva Sans Italics"/>
+                <a:cs typeface="Canva Sans Italics"/>
+                <a:sym typeface="Canva Sans Italics"/>
+              </a:rPr>
+              <a:t>npj Artificial Intelligence</a:t>
+            </a:r>
+          </a:p>
+        </p:txBody>
+      </p:sp>
+      <p:sp>
+        <p:nvSpPr>
+          <p:cNvPr name="TextBox 8" id="8"/>
+          <p:cNvSpPr txBox="true"/>
+          <p:nvPr/>
+        </p:nvSpPr>
+        <p:spPr>
+          <a:xfrm rot="0">
+            <a:off x="17259300" y="9210675"/>
+            <a:ext cx="152400" cy="200025"/>
+          </a:xfrm>
+          <a:prstGeom prst="rect">
+            <a:avLst/>
+          </a:prstGeom>
+        </p:spPr>
+        <p:txBody>
+          <a:bodyPr anchor="t" rtlCol="false" tIns="0" lIns="0" bIns="0" rIns="0" wrap="none">
+            <a:spAutoFit/>
+          </a:bodyPr>
+          <a:lstStyle/>
+          <a:p>
+            <a:pPr algn="ctr">
+              <a:lnSpc>
+                <a:spcPts val="2800"/>
+              </a:lnSpc>
+              <a:spcBef>
+                <a:spcPct val="0"/>
+              </a:spcBef>
+            </a:pPr>
+            <a:r>
+              <a:rPr lang="en-US" sz="2000">
+                <a:solidFill>
+                  <a:srgbClr val="025841"/>
+                </a:solidFill>
+                <a:latin typeface="Canva Sans"/>
+                <a:ea typeface="Canva Sans"/>
+                <a:cs typeface="Canva Sans"/>
+                <a:sym typeface="Canva Sans"/>
+              </a:rPr>
+              <a:t>5</a:t>
+            </a:r>
+          </a:p>
+        </p:txBody>
+      </p:sp>
+      <p:sp>
+        <p:nvSpPr>
+          <p:cNvPr name="TextBox 9" id="9"/>
+          <p:cNvSpPr txBox="true"/>
+          <p:nvPr/>
+        </p:nvSpPr>
+        <p:spPr>
+          <a:xfrm rot="0">
+            <a:off x="10294333" y="4390990"/>
+            <a:ext cx="7255102" cy="4605020"/>
+          </a:xfrm>
+          <a:prstGeom prst="rect">
+            <a:avLst/>
+          </a:prstGeom>
+        </p:spPr>
+        <p:txBody>
+          <a:bodyPr anchor="t" rtlCol="false" tIns="0" lIns="0" bIns="0" rIns="0">
+            <a:spAutoFit/>
+          </a:bodyPr>
+          <a:lstStyle/>
+          <a:p>
+            <a:pPr algn="l" marL="496571" indent="-248285" lvl="1">
+              <a:lnSpc>
+                <a:spcPts val="4600"/>
+              </a:lnSpc>
+              <a:buFont typeface="Arial"/>
+              <a:buChar char="•"/>
+            </a:pPr>
+            <a:r>
+              <a:rPr lang="en-US" sz="2300">
+                <a:solidFill>
+                  <a:srgbClr val="025841"/>
+                </a:solidFill>
+                <a:latin typeface="Poppins"/>
+                <a:ea typeface="Poppins"/>
+                <a:cs typeface="Poppins"/>
+                <a:sym typeface="Poppins"/>
+              </a:rPr>
+              <a:t>Here, sequence embeddings from some state-of-the-art genomic LLMs are visualised using uniform manifold approximation and projection (UMAP), coloured by gene types</a:t>
+            </a:r>
+          </a:p>
+          <a:p>
+            <a:pPr algn="l" marL="496571" indent="-248285" lvl="1">
+              <a:lnSpc>
+                <a:spcPts val="4600"/>
+              </a:lnSpc>
+              <a:buFont typeface="Arial"/>
+              <a:buChar char="•"/>
+            </a:pPr>
+            <a:r>
+              <a:rPr lang="en-US" sz="2300">
+                <a:solidFill>
+                  <a:srgbClr val="025841"/>
+                </a:solidFill>
+                <a:latin typeface="Poppins"/>
+                <a:ea typeface="Poppins"/>
+                <a:cs typeface="Poppins"/>
+                <a:sym typeface="Poppins"/>
+              </a:rPr>
+              <a:t>Protein-encoding genes are coloured in pink</a:t>
+            </a:r>
+          </a:p>
+          <a:p>
+            <a:pPr algn="l" marL="496571" indent="-248285" lvl="1">
+              <a:lnSpc>
+                <a:spcPts val="4600"/>
+              </a:lnSpc>
+              <a:buFont typeface="Arial"/>
+              <a:buChar char="•"/>
+            </a:pPr>
+            <a:r>
+              <a:rPr lang="en-US" sz="2300">
+                <a:solidFill>
+                  <a:srgbClr val="025841"/>
+                </a:solidFill>
+                <a:latin typeface="Poppins"/>
+                <a:ea typeface="Poppins"/>
+                <a:cs typeface="Poppins"/>
+                <a:sym typeface="Poppins"/>
+              </a:rPr>
+              <a:t>The models with the most informative embeddings are those which have clear separation between clusters</a:t>
+            </a:r>
+          </a:p>
+        </p:txBody>
+      </p:sp>
+    </p:spTree>
+  </p:cSld>
+  <p:clrMapOvr>
+    <a:masterClrMapping/>
+  </p:clrMapOvr>
+</p:sld>
+</file>
+
+<file path=ppt/slides/slide6.xml><?xml version="1.0" encoding="utf-8"?>
+<p:sld xmlns:p="http://schemas.openxmlformats.org/presentationml/2006/main" xmlns:a="http://schemas.openxmlformats.org/drawingml/2006/main" xmlns:r="http://schemas.openxmlformats.org/officeDocument/2006/relationships">
+  <p:cSld>
+    <p:spTree>
+      <p:nvGrpSpPr>
+        <p:cNvPr id="1" name=""/>
+        <p:cNvGrpSpPr/>
+        <p:nvPr/>
+      </p:nvGrpSpPr>
+      <p:grpSpPr>
+        <a:xfrm>
+          <a:off x="0" y="0"/>
+          <a:ext cx="0" cy="0"/>
+          <a:chOff x="0" y="0"/>
+          <a:chExt cx="0" cy="0"/>
+        </a:xfrm>
+      </p:grpSpPr>
+      <p:sp>
+        <p:nvSpPr>
+          <p:cNvPr name="Freeform 2" id="2"/>
+          <p:cNvSpPr/>
+          <p:nvPr/>
+        </p:nvSpPr>
+        <p:spPr>
+          <a:xfrm flipH="false" flipV="false" rot="0">
+            <a:off x="-1605763" y="-535229"/>
+            <a:ext cx="6455904" cy="6105039"/>
+          </a:xfrm>
+          <a:custGeom>
+            <a:avLst/>
+            <a:gdLst/>
+            <a:ahLst/>
+            <a:cxnLst/>
+            <a:rect r="r" b="b" t="t" l="l"/>
+            <a:pathLst>
+              <a:path h="6105039" w="6455904">
+                <a:moveTo>
+                  <a:pt x="0" y="0"/>
+                </a:moveTo>
+                <a:lnTo>
+                  <a:pt x="6455903" y="0"/>
+                </a:lnTo>
+                <a:lnTo>
+                  <a:pt x="6455903" y="6105039"/>
+                </a:lnTo>
+                <a:lnTo>
+                  <a:pt x="0" y="6105039"/>
+                </a:lnTo>
+                <a:lnTo>
+                  <a:pt x="0" y="0"/>
+                </a:lnTo>
+                <a:close/>
+              </a:path>
+            </a:pathLst>
+          </a:custGeom>
+          <a:blipFill>
+            <a:blip r:embed="rId2">
+              <a:alphaModFix amt="14000"/>
+              <a:extLst>
+                <a:ext uri="{96DAC541-7B7A-43D3-8B79-37D633B846F1}">
+                  <asvg:svgBlip xmlns:asvg="http://schemas.microsoft.com/office/drawing/2016/SVG/main" r:embed="rId3"/>
+                </a:ext>
+              </a:extLst>
+            </a:blip>
+            <a:stretch>
+              <a:fillRect l="0" t="0" r="0" b="0"/>
+            </a:stretch>
+          </a:blipFill>
+        </p:spPr>
+      </p:sp>
+      <p:sp>
+        <p:nvSpPr>
+          <p:cNvPr name="Freeform 3" id="3"/>
+          <p:cNvSpPr/>
+          <p:nvPr/>
+        </p:nvSpPr>
+        <p:spPr>
+          <a:xfrm flipH="false" flipV="false" rot="0">
+            <a:off x="14031348" y="-1785840"/>
+            <a:ext cx="6455904" cy="6105039"/>
+          </a:xfrm>
+          <a:custGeom>
+            <a:avLst/>
+            <a:gdLst/>
+            <a:ahLst/>
+            <a:cxnLst/>
+            <a:rect r="r" b="b" t="t" l="l"/>
+            <a:pathLst>
+              <a:path h="6105039" w="6455904">
+                <a:moveTo>
+                  <a:pt x="0" y="0"/>
+                </a:moveTo>
+                <a:lnTo>
+                  <a:pt x="6455904" y="0"/>
+                </a:lnTo>
+                <a:lnTo>
+                  <a:pt x="6455904" y="6105039"/>
+                </a:lnTo>
+                <a:lnTo>
+                  <a:pt x="0" y="6105039"/>
+                </a:lnTo>
+                <a:lnTo>
+                  <a:pt x="0" y="0"/>
+                </a:lnTo>
+                <a:close/>
+              </a:path>
+            </a:pathLst>
+          </a:custGeom>
+          <a:blipFill>
+            <a:blip r:embed="rId2">
+              <a:alphaModFix amt="14000"/>
+              <a:extLst>
+                <a:ext uri="{96DAC541-7B7A-43D3-8B79-37D633B846F1}">
+                  <asvg:svgBlip xmlns:asvg="http://schemas.microsoft.com/office/drawing/2016/SVG/main" r:embed="rId3"/>
+                </a:ext>
+              </a:extLst>
+            </a:blip>
+            <a:stretch>
+              <a:fillRect l="0" t="0" r="0" b="0"/>
+            </a:stretch>
+          </a:blipFill>
+        </p:spPr>
+      </p:sp>
+      <p:sp>
+        <p:nvSpPr>
+          <p:cNvPr name="Freeform 4" id="4"/>
+          <p:cNvSpPr/>
+          <p:nvPr/>
+        </p:nvSpPr>
+        <p:spPr>
+          <a:xfrm flipH="false" flipV="false" rot="0">
+            <a:off x="877304" y="2887673"/>
+            <a:ext cx="12798137" cy="6034308"/>
+          </a:xfrm>
+          <a:custGeom>
+            <a:avLst/>
+            <a:gdLst/>
+            <a:ahLst/>
+            <a:cxnLst/>
+            <a:rect r="r" b="b" t="t" l="l"/>
+            <a:pathLst>
+              <a:path h="6034308" w="12798137">
+                <a:moveTo>
+                  <a:pt x="0" y="0"/>
+                </a:moveTo>
+                <a:lnTo>
+                  <a:pt x="12798137" y="0"/>
+                </a:lnTo>
+                <a:lnTo>
+                  <a:pt x="12798137" y="6034309"/>
+                </a:lnTo>
+                <a:lnTo>
+                  <a:pt x="0" y="6034309"/>
+                </a:lnTo>
+                <a:lnTo>
+                  <a:pt x="0" y="0"/>
+                </a:lnTo>
+                <a:close/>
+              </a:path>
+            </a:pathLst>
+          </a:custGeom>
+          <a:blipFill>
+            <a:blip r:embed="rId4"/>
+            <a:stretch>
+              <a:fillRect l="0" t="0" r="0" b="0"/>
+            </a:stretch>
+          </a:blipFill>
+        </p:spPr>
+      </p:sp>
+      <p:sp>
+        <p:nvSpPr>
+          <p:cNvPr name="TextBox 5" id="5"/>
+          <p:cNvSpPr txBox="true"/>
+          <p:nvPr/>
+        </p:nvSpPr>
+        <p:spPr>
+          <a:xfrm rot="0">
+            <a:off x="453510" y="677228"/>
+            <a:ext cx="17281433" cy="717930"/>
+          </a:xfrm>
+          <a:prstGeom prst="rect">
+            <a:avLst/>
+          </a:prstGeom>
+        </p:spPr>
+        <p:txBody>
+          <a:bodyPr anchor="t" rtlCol="false" tIns="0" lIns="0" bIns="0" rIns="0">
+            <a:spAutoFit/>
+          </a:bodyPr>
+          <a:lstStyle/>
+          <a:p>
+            <a:pPr algn="ctr">
+              <a:lnSpc>
+                <a:spcPts val="4981"/>
+              </a:lnSpc>
+            </a:pPr>
+            <a:r>
+              <a:rPr lang="en-US" b="true" sz="5299">
+                <a:solidFill>
+                  <a:srgbClr val="025841"/>
+                </a:solidFill>
+                <a:latin typeface="Poppins Ultra-Bold"/>
+                <a:ea typeface="Poppins Ultra-Bold"/>
+                <a:cs typeface="Poppins Ultra-Bold"/>
+                <a:sym typeface="Poppins Ultra-Bold"/>
+              </a:rPr>
+              <a:t>ZERO-SHOT PREDICTION USING GLM EMBEDDINGS</a:t>
+            </a:r>
+          </a:p>
+        </p:txBody>
+      </p:sp>
+      <p:sp>
+        <p:nvSpPr>
+          <p:cNvPr name="TextBox 6" id="6"/>
+          <p:cNvSpPr txBox="true"/>
+          <p:nvPr/>
+        </p:nvSpPr>
+        <p:spPr>
+          <a:xfrm rot="0">
+            <a:off x="1020179" y="1466946"/>
+            <a:ext cx="16230600" cy="1690371"/>
+          </a:xfrm>
+          <a:prstGeom prst="rect">
+            <a:avLst/>
+          </a:prstGeom>
+        </p:spPr>
+        <p:txBody>
+          <a:bodyPr anchor="t" rtlCol="false" tIns="0" lIns="0" bIns="0" rIns="0">
+            <a:spAutoFit/>
+          </a:bodyPr>
+          <a:lstStyle/>
+          <a:p>
+            <a:pPr algn="l" marL="496569" indent="-248284" lvl="1">
+              <a:lnSpc>
+                <a:spcPts val="4599"/>
+              </a:lnSpc>
+              <a:buFont typeface="Arial"/>
+              <a:buChar char="•"/>
+            </a:pPr>
+            <a:r>
+              <a:rPr lang="en-US" sz="2299">
+                <a:solidFill>
+                  <a:srgbClr val="025841"/>
+                </a:solidFill>
+                <a:latin typeface="Poppins"/>
+                <a:ea typeface="Poppins"/>
+                <a:cs typeface="Poppins"/>
+                <a:sym typeface="Poppins"/>
+              </a:rPr>
+              <a:t>gLLM embeddings can be used for zero-shot prediction on downstream tasks</a:t>
+            </a:r>
+          </a:p>
+          <a:p>
+            <a:pPr algn="l" marL="496569" indent="-248284" lvl="1">
+              <a:lnSpc>
+                <a:spcPts val="4599"/>
+              </a:lnSpc>
+              <a:buFont typeface="Arial"/>
+              <a:buChar char="•"/>
+            </a:pPr>
+            <a:r>
+              <a:rPr lang="en-US" sz="2299">
+                <a:solidFill>
+                  <a:srgbClr val="025841"/>
+                </a:solidFill>
+                <a:latin typeface="Poppins"/>
+                <a:ea typeface="Poppins"/>
+                <a:cs typeface="Poppins"/>
+                <a:sym typeface="Poppins"/>
+              </a:rPr>
+              <a:t>Instead of using supervised fine-tuning, we can use the embeddings as features</a:t>
+            </a:r>
+          </a:p>
+          <a:p>
+            <a:pPr algn="l">
+              <a:lnSpc>
+                <a:spcPts val="4599"/>
+              </a:lnSpc>
+            </a:pPr>
+          </a:p>
+        </p:txBody>
+      </p:sp>
+      <p:sp>
+        <p:nvSpPr>
+          <p:cNvPr name="TextBox 7" id="7"/>
+          <p:cNvSpPr txBox="true"/>
+          <p:nvPr/>
+        </p:nvSpPr>
+        <p:spPr>
+          <a:xfrm rot="0">
+            <a:off x="1028700" y="9550400"/>
+            <a:ext cx="11425182" cy="323215"/>
+          </a:xfrm>
+          <a:prstGeom prst="rect">
+            <a:avLst/>
+          </a:prstGeom>
+        </p:spPr>
+        <p:txBody>
+          <a:bodyPr anchor="t" rtlCol="false" tIns="0" lIns="0" bIns="0" rIns="0">
+            <a:spAutoFit/>
+          </a:bodyPr>
+          <a:lstStyle/>
+          <a:p>
+            <a:pPr algn="l" marL="410209" indent="-205105" lvl="1">
+              <a:lnSpc>
+                <a:spcPts val="2659"/>
+              </a:lnSpc>
+              <a:buFont typeface="Arial"/>
+              <a:buChar char="•"/>
+            </a:pPr>
+            <a:r>
+              <a:rPr lang="en-US" sz="1899">
+                <a:solidFill>
+                  <a:srgbClr val="025841"/>
+                </a:solidFill>
+                <a:latin typeface="Canva Sans"/>
+                <a:ea typeface="Canva Sans"/>
+                <a:cs typeface="Canva Sans"/>
+                <a:sym typeface="Canva Sans"/>
+              </a:rPr>
+              <a:t>Dalla-Torre, H., </a:t>
+            </a:r>
+            <a:r>
+              <a:rPr lang="en-US" sz="1899" i="true">
+                <a:solidFill>
+                  <a:srgbClr val="025841"/>
+                </a:solidFill>
+                <a:latin typeface="Canva Sans Italics"/>
+                <a:ea typeface="Canva Sans Italics"/>
+                <a:cs typeface="Canva Sans Italics"/>
+                <a:sym typeface="Canva Sans Italics"/>
+              </a:rPr>
+              <a:t>et al. </a:t>
+            </a:r>
+            <a:r>
+              <a:rPr lang="en-US" sz="1899">
+                <a:solidFill>
+                  <a:srgbClr val="025841"/>
+                </a:solidFill>
+                <a:latin typeface="Canva Sans"/>
+                <a:ea typeface="Canva Sans"/>
+                <a:cs typeface="Canva Sans"/>
+                <a:sym typeface="Canva Sans"/>
+              </a:rPr>
+              <a:t>(2024), </a:t>
+            </a:r>
+            <a:r>
+              <a:rPr lang="en-US" sz="1899" i="true">
+                <a:solidFill>
+                  <a:srgbClr val="025841"/>
+                </a:solidFill>
+                <a:latin typeface="Canva Sans Italics"/>
+                <a:ea typeface="Canva Sans Italics"/>
+                <a:cs typeface="Canva Sans Italics"/>
+                <a:sym typeface="Canva Sans Italics"/>
+              </a:rPr>
+              <a:t>Nature Methods</a:t>
+            </a:r>
+          </a:p>
+        </p:txBody>
+      </p:sp>
+      <p:sp>
+        <p:nvSpPr>
+          <p:cNvPr name="TextBox 8" id="8"/>
+          <p:cNvSpPr txBox="true"/>
+          <p:nvPr/>
+        </p:nvSpPr>
+        <p:spPr>
+          <a:xfrm rot="0">
+            <a:off x="17259300" y="9210675"/>
+            <a:ext cx="152400" cy="200025"/>
+          </a:xfrm>
+          <a:prstGeom prst="rect">
+            <a:avLst/>
+          </a:prstGeom>
+        </p:spPr>
+        <p:txBody>
+          <a:bodyPr anchor="t" rtlCol="false" tIns="0" lIns="0" bIns="0" rIns="0" wrap="none">
+            <a:spAutoFit/>
+          </a:bodyPr>
+          <a:lstStyle/>
+          <a:p>
+            <a:pPr algn="ctr">
+              <a:lnSpc>
+                <a:spcPts val="2800"/>
+              </a:lnSpc>
+              <a:spcBef>
+                <a:spcPct val="0"/>
+              </a:spcBef>
+            </a:pPr>
+            <a:r>
+              <a:rPr lang="en-US" sz="2000">
+                <a:solidFill>
+                  <a:srgbClr val="025841"/>
+                </a:solidFill>
+                <a:latin typeface="Canva Sans"/>
+                <a:ea typeface="Canva Sans"/>
+                <a:cs typeface="Canva Sans"/>
+                <a:sym typeface="Canva Sans"/>
+              </a:rPr>
+              <a:t>6</a:t>
+            </a:r>
+          </a:p>
+        </p:txBody>
+      </p:sp>
+      <p:sp>
+        <p:nvSpPr>
+          <p:cNvPr name="TextBox 9" id="9"/>
+          <p:cNvSpPr txBox="true"/>
+          <p:nvPr/>
+        </p:nvSpPr>
+        <p:spPr>
+          <a:xfrm rot="0">
+            <a:off x="14038906" y="2840048"/>
+            <a:ext cx="3544641" cy="6132502"/>
+          </a:xfrm>
+          <a:prstGeom prst="rect">
+            <a:avLst/>
+          </a:prstGeom>
+        </p:spPr>
+        <p:txBody>
+          <a:bodyPr anchor="t" rtlCol="false" tIns="0" lIns="0" bIns="0" rIns="0">
+            <a:spAutoFit/>
+          </a:bodyPr>
+          <a:lstStyle/>
+          <a:p>
+            <a:pPr algn="l">
+              <a:lnSpc>
+                <a:spcPts val="3238"/>
+              </a:lnSpc>
+              <a:spcBef>
+                <a:spcPct val="0"/>
+              </a:spcBef>
+            </a:pPr>
+            <a:r>
+              <a:rPr lang="en-US" sz="2312">
+                <a:solidFill>
+                  <a:srgbClr val="025841"/>
+                </a:solidFill>
+                <a:latin typeface="Canva Sans"/>
+                <a:ea typeface="Canva Sans"/>
+                <a:cs typeface="Canva Sans"/>
+                <a:sym typeface="Canva Sans"/>
+              </a:rPr>
+              <a:t>For instance, for variant effect prediction, we can do the following:</a:t>
+            </a:r>
+          </a:p>
+          <a:p>
+            <a:pPr algn="l" marL="499362" indent="-249681" lvl="1">
+              <a:lnSpc>
+                <a:spcPts val="3238"/>
+              </a:lnSpc>
+              <a:spcBef>
+                <a:spcPct val="0"/>
+              </a:spcBef>
+              <a:buAutoNum type="arabicPeriod" startAt="1"/>
+            </a:pPr>
+            <a:r>
+              <a:rPr lang="en-US" sz="2312">
+                <a:solidFill>
+                  <a:srgbClr val="025841"/>
+                </a:solidFill>
+                <a:latin typeface="Canva Sans"/>
+                <a:ea typeface="Canva Sans"/>
+                <a:cs typeface="Canva Sans"/>
+                <a:sym typeface="Canva Sans"/>
+              </a:rPr>
+              <a:t>Extract embeddings for reference (wild-type) sequence</a:t>
+            </a:r>
+          </a:p>
+          <a:p>
+            <a:pPr algn="l" marL="499362" indent="-249681" lvl="1">
+              <a:lnSpc>
+                <a:spcPts val="3238"/>
+              </a:lnSpc>
+              <a:spcBef>
+                <a:spcPct val="0"/>
+              </a:spcBef>
+              <a:buAutoNum type="arabicPeriod" startAt="1"/>
+            </a:pPr>
+            <a:r>
+              <a:rPr lang="en-US" sz="2312">
+                <a:solidFill>
+                  <a:srgbClr val="025841"/>
+                </a:solidFill>
+                <a:latin typeface="Canva Sans"/>
+                <a:ea typeface="Canva Sans"/>
+                <a:cs typeface="Canva Sans"/>
+                <a:sym typeface="Canva Sans"/>
+              </a:rPr>
+              <a:t>Extract embeddings for alternate (mutated) sequence</a:t>
+            </a:r>
+          </a:p>
+          <a:p>
+            <a:pPr algn="l" marL="499362" indent="-249681" lvl="1">
+              <a:lnSpc>
+                <a:spcPts val="3238"/>
+              </a:lnSpc>
+              <a:spcBef>
+                <a:spcPct val="0"/>
+              </a:spcBef>
+              <a:buAutoNum type="arabicPeriod" startAt="1"/>
+            </a:pPr>
+            <a:r>
+              <a:rPr lang="en-US" sz="2312">
+                <a:solidFill>
+                  <a:srgbClr val="025841"/>
+                </a:solidFill>
+                <a:latin typeface="Canva Sans"/>
+                <a:ea typeface="Canva Sans"/>
+                <a:cs typeface="Canva Sans"/>
+                <a:sym typeface="Canva Sans"/>
+              </a:rPr>
+              <a:t>Calculate the difference in these embeddings as the variant effect score</a:t>
+            </a:r>
+          </a:p>
+          <a:p>
+            <a:pPr algn="l">
+              <a:lnSpc>
+                <a:spcPts val="3238"/>
+              </a:lnSpc>
+              <a:spcBef>
+                <a:spcPct val="0"/>
+              </a:spcBef>
+            </a:pPr>
+            <a:r>
+              <a:rPr lang="en-US" sz="2312">
+                <a:solidFill>
+                  <a:srgbClr val="025841"/>
+                </a:solidFill>
+                <a:latin typeface="Canva Sans"/>
+                <a:ea typeface="Canva Sans"/>
+                <a:cs typeface="Canva Sans"/>
+                <a:sym typeface="Canva Sans"/>
+              </a:rPr>
+              <a:t>The difference method we use affects the score!</a:t>
+            </a:r>
+          </a:p>
+        </p:txBody>
+      </p:sp>
+    </p:spTree>
+  </p:cSld>
+  <p:clrMapOvr>
+    <a:masterClrMapping/>
+  </p:clrMapOvr>
+</p:sld>
+</file>
+
+<file path=ppt/slides/slide7.xml><?xml version="1.0" encoding="utf-8"?>
 <p:sld xmlns:p="http://schemas.openxmlformats.org/presentationml/2006/main" xmlns:a="http://schemas.openxmlformats.org/drawingml/2006/main" xmlns:r="http://schemas.openxmlformats.org/officeDocument/2006/relationships">
   <p:cSld>
     <p:spTree>
@@ -8446,7 +9599,7 @@
                 <a:cs typeface="Canva Sans"/>
                 <a:sym typeface="Canva Sans"/>
               </a:rPr>
-              <a:t>5</a:t>
+              <a:t>7</a:t>
             </a:r>
           </a:p>
         </p:txBody>
@@ -8459,8 +9612,8 @@
         </p:nvSpPr>
         <p:spPr>
           <a:xfrm rot="0">
-            <a:off x="1622189" y="5610707"/>
-            <a:ext cx="14717789" cy="4016375"/>
+            <a:off x="1622189" y="5429732"/>
+            <a:ext cx="14717789" cy="4595496"/>
           </a:xfrm>
           <a:prstGeom prst="rect">
             <a:avLst/>
@@ -8472,15 +9625,15 @@
           </a:bodyPr>
           <a:lstStyle/>
           <a:p>
-            <a:pPr algn="l" marL="431801" indent="-215900" lvl="1">
+            <a:pPr algn="l" marL="496569" indent="-248284" lvl="1">
               <a:lnSpc>
-                <a:spcPts val="4000"/>
+                <a:spcPts val="4599"/>
               </a:lnSpc>
               <a:buFont typeface="Arial"/>
               <a:buChar char="•"/>
             </a:pPr>
             <a:r>
-              <a:rPr lang="en-US" sz="2000">
+              <a:rPr lang="en-US" sz="2299">
                 <a:solidFill>
                   <a:srgbClr val="025841"/>
                 </a:solidFill>
@@ -8495,20 +9648,20 @@
           <a:p>
             <a:pPr algn="l">
               <a:lnSpc>
-                <a:spcPts val="4000"/>
+                <a:spcPts val="4599"/>
               </a:lnSpc>
             </a:pPr>
           </a:p>
           <a:p>
-            <a:pPr algn="l" marL="431801" indent="-215900" lvl="1">
+            <a:pPr algn="l" marL="496569" indent="-248284" lvl="1">
               <a:lnSpc>
-                <a:spcPts val="4000"/>
+                <a:spcPts val="4599"/>
               </a:lnSpc>
               <a:buFont typeface="Arial"/>
               <a:buChar char="•"/>
             </a:pPr>
             <a:r>
-              <a:rPr lang="en-US" sz="2000">
+              <a:rPr lang="en-US" sz="2299">
                 <a:solidFill>
                   <a:srgbClr val="025841"/>
                 </a:solidFill>
@@ -8523,20 +9676,20 @@
           <a:p>
             <a:pPr algn="l">
               <a:lnSpc>
-                <a:spcPts val="4000"/>
+                <a:spcPts val="4599"/>
               </a:lnSpc>
             </a:pPr>
           </a:p>
           <a:p>
-            <a:pPr algn="l" marL="431801" indent="-215900" lvl="1">
+            <a:pPr algn="l" marL="496569" indent="-248284" lvl="1">
               <a:lnSpc>
-                <a:spcPts val="4000"/>
+                <a:spcPts val="4599"/>
               </a:lnSpc>
               <a:buFont typeface="Arial"/>
               <a:buChar char="•"/>
             </a:pPr>
             <a:r>
-              <a:rPr lang="en-US" sz="2000">
+              <a:rPr lang="en-US" sz="2299">
                 <a:solidFill>
                   <a:srgbClr val="025841"/>
                 </a:solidFill>
@@ -8549,15 +9702,15 @@
             </a:r>
           </a:p>
           <a:p>
-            <a:pPr algn="l" marL="431801" indent="-215900" lvl="1">
+            <a:pPr algn="l" marL="496569" indent="-248284" lvl="1">
               <a:lnSpc>
-                <a:spcPts val="4000"/>
+                <a:spcPts val="4599"/>
               </a:lnSpc>
               <a:buFont typeface="Arial"/>
               <a:buChar char="•"/>
             </a:pPr>
             <a:r>
-              <a:rPr lang="en-US" sz="2000">
+              <a:rPr lang="en-US" sz="2299">
                 <a:solidFill>
                   <a:srgbClr val="025841"/>
                 </a:solidFill>
@@ -8570,15 +9723,15 @@
             </a:r>
           </a:p>
           <a:p>
-            <a:pPr algn="l" marL="863601" indent="-287867" lvl="2">
+            <a:pPr algn="l" marL="993138" indent="-331046" lvl="2">
               <a:lnSpc>
-                <a:spcPts val="4000"/>
+                <a:spcPts val="4599"/>
               </a:lnSpc>
               <a:buFont typeface="Arial"/>
               <a:buChar char="⚬"/>
             </a:pPr>
             <a:r>
-              <a:rPr lang="en-US" sz="2000">
+              <a:rPr lang="en-US" sz="2299">
                 <a:solidFill>
                   <a:srgbClr val="025841"/>
                 </a:solidFill>
@@ -8590,7 +9743,7 @@
               <a:t>Hu, E.J. </a:t>
             </a:r>
             <a:r>
-              <a:rPr lang="en-US" sz="2000" i="true">
+              <a:rPr lang="en-US" sz="2299" i="true">
                 <a:solidFill>
                   <a:srgbClr val="025841"/>
                 </a:solidFill>
@@ -8602,7 +9755,7 @@
               <a:t>et al. </a:t>
             </a:r>
             <a:r>
-              <a:rPr lang="en-US" sz="2000">
+              <a:rPr lang="en-US" sz="2299">
                 <a:solidFill>
                   <a:srgbClr val="025841"/>
                 </a:solidFill>
@@ -8624,7 +9777,7 @@
 </p:sld>
 </file>
 
-<file path=ppt/slides/slide6.xml><?xml version="1.0" encoding="utf-8"?>
+<file path=ppt/slides/slide8.xml><?xml version="1.0" encoding="utf-8"?>
 <p:sld xmlns:p="http://schemas.openxmlformats.org/presentationml/2006/main" xmlns:a="http://schemas.openxmlformats.org/drawingml/2006/main" xmlns:r="http://schemas.openxmlformats.org/officeDocument/2006/relationships">
   <p:cSld>
     <p:spTree>
@@ -8680,7 +9833,7 @@
                 <a:cs typeface="Canva Sans"/>
                 <a:sym typeface="Canva Sans"/>
               </a:rPr>
-              <a:t>6</a:t>
+              <a:t>8</a:t>
             </a:r>
           </a:p>
         </p:txBody>
